--- a/AIFinanceCrashcourse/slides/Module-10-Capstone-Integrated-System.pptx
+++ b/AIFinanceCrashcourse/slides/Module-10-Capstone-Integrated-System.pptx
@@ -3267,7 +3267,7 @@
                   <a:srgbClr val="C9A227"/>
                 </a:solidFill>
               </a:rPr>
-              <a:t>ISBMS · PGDM 2025–27 · SEMESTER III · SESSION 10 OF 10</a:t>
+              <a:t>AI IN FINANCE · THE COMPLETE CRASH COURSE · MODULE 10 OF 10</a:t>
             </a:r>
           </a:p>
         </p:txBody>
@@ -3411,7 +3411,7 @@
                   <a:srgbClr val="8FA1C4"/>
                 </a:solidFill>
               </a:rPr>
-              <a:t>Faculty · Agentic AI &amp; Advanced Analytics in Finance (PGDM-SEM3-SPEC-AIFINANCE)</a:t>
+              <a:t>AI in Finance: The Complete Crash Course</a:t>
             </a:r>
           </a:p>
           <a:p>
@@ -3426,7 +3426,7 @@
                   <a:srgbClr val="C9A227"/>
                 </a:solidFill>
               </a:rPr>
-              <a:t>tejasgjadhav.github.io/AIFINANCE</a:t>
+              <a:t>tejasgjadhav.github.io/AIFinanceCrashcourse</a:t>
             </a:r>
           </a:p>
         </p:txBody>
@@ -3734,7 +3734,7 @@
                   <a:srgbClr val="8FA1C4"/>
                 </a:solidFill>
               </a:rPr>
-              <a:t>ISBMS · PGDM 2025–27 · AGENTIC AI &amp; ADVANCED ANALYTICS IN FINANCE</a:t>
+              <a:t>AI IN FINANCE · THE COMPLETE CRASH COURSE</a:t>
             </a:r>
           </a:p>
         </p:txBody>
@@ -4329,7 +4329,7 @@
                   <a:srgbClr val="C9A227"/>
                 </a:solidFill>
               </a:rPr>
-              <a:t>▪  </a:t>
+              <a:t>▪</a:t>
             </a:r>
             <a:r>
               <a:rPr sz="950" b="0">
@@ -4371,7 +4371,7 @@
                   <a:srgbClr val="C9A227"/>
                 </a:solidFill>
               </a:rPr>
-              <a:t>▪  </a:t>
+              <a:t>▪</a:t>
             </a:r>
             <a:r>
               <a:rPr sz="950" b="0">
@@ -4413,7 +4413,7 @@
                   <a:srgbClr val="C9A227"/>
                 </a:solidFill>
               </a:rPr>
-              <a:t>▪  </a:t>
+              <a:t>▪</a:t>
             </a:r>
             <a:r>
               <a:rPr sz="950" b="0">
@@ -4612,7 +4612,7 @@
                   <a:srgbClr val="C9A227"/>
                 </a:solidFill>
               </a:rPr>
-              <a:t>▪  </a:t>
+              <a:t>▪</a:t>
             </a:r>
             <a:r>
               <a:rPr sz="950" b="0">
@@ -4654,7 +4654,7 @@
                   <a:srgbClr val="C9A227"/>
                 </a:solidFill>
               </a:rPr>
-              <a:t>▪  </a:t>
+              <a:t>▪</a:t>
             </a:r>
             <a:r>
               <a:rPr sz="950" b="0">
@@ -4696,7 +4696,7 @@
                   <a:srgbClr val="C9A227"/>
                 </a:solidFill>
               </a:rPr>
-              <a:t>▪  </a:t>
+              <a:t>▪</a:t>
             </a:r>
             <a:r>
               <a:rPr sz="950" b="0">
@@ -4895,7 +4895,7 @@
                   <a:srgbClr val="C9A227"/>
                 </a:solidFill>
               </a:rPr>
-              <a:t>▪  </a:t>
+              <a:t>▪</a:t>
             </a:r>
             <a:r>
               <a:rPr sz="950" b="0">
@@ -4937,7 +4937,7 @@
                   <a:srgbClr val="C9A227"/>
                 </a:solidFill>
               </a:rPr>
-              <a:t>▪  </a:t>
+              <a:t>▪</a:t>
             </a:r>
             <a:r>
               <a:rPr sz="950" b="0">
@@ -4979,7 +4979,7 @@
                   <a:srgbClr val="C9A227"/>
                 </a:solidFill>
               </a:rPr>
-              <a:t>▪  </a:t>
+              <a:t>▪</a:t>
             </a:r>
             <a:r>
               <a:rPr sz="950" b="0">
@@ -5021,7 +5021,7 @@
                   <a:srgbClr val="5D6B7E"/>
                 </a:solidFill>
               </a:rPr>
-              <a:t>ISBMS · PGDM 2025–27 · AGENTIC AI &amp; ADVANCED ANALYTICS IN FINANCE</a:t>
+              <a:t>AI IN FINANCE · THE COMPLETE CRASH COURSE</a:t>
             </a:r>
           </a:p>
         </p:txBody>
@@ -5331,7 +5331,7 @@
                   <a:srgbClr val="C9A227"/>
                 </a:solidFill>
               </a:rPr>
-              <a:t>TIP  </a:t>
+              <a:t>TIP</a:t>
             </a:r>
             <a:r>
               <a:rPr sz="900" b="0">
@@ -5511,7 +5511,7 @@
                   <a:srgbClr val="C9A227"/>
                 </a:solidFill>
               </a:rPr>
-              <a:t>TIP  </a:t>
+              <a:t>TIP</a:t>
             </a:r>
             <a:r>
               <a:rPr sz="900" b="0">
@@ -5691,7 +5691,7 @@
                   <a:srgbClr val="C9A227"/>
                 </a:solidFill>
               </a:rPr>
-              <a:t>TIP  </a:t>
+              <a:t>TIP</a:t>
             </a:r>
             <a:r>
               <a:rPr sz="900" b="0">
@@ -5871,7 +5871,7 @@
                   <a:srgbClr val="C9A227"/>
                 </a:solidFill>
               </a:rPr>
-              <a:t>TIP  </a:t>
+              <a:t>TIP</a:t>
             </a:r>
             <a:r>
               <a:rPr sz="900" b="0">
@@ -6051,7 +6051,7 @@
                   <a:srgbClr val="C9A227"/>
                 </a:solidFill>
               </a:rPr>
-              <a:t>TIP  </a:t>
+              <a:t>TIP</a:t>
             </a:r>
             <a:r>
               <a:rPr sz="900" b="0">
@@ -6231,7 +6231,7 @@
                   <a:srgbClr val="C9A227"/>
                 </a:solidFill>
               </a:rPr>
-              <a:t>TIP  </a:t>
+              <a:t>TIP</a:t>
             </a:r>
             <a:r>
               <a:rPr sz="900" b="0">
@@ -6411,7 +6411,7 @@
                   <a:srgbClr val="C9A227"/>
                 </a:solidFill>
               </a:rPr>
-              <a:t>TIP  </a:t>
+              <a:t>TIP</a:t>
             </a:r>
             <a:r>
               <a:rPr sz="900" b="0">
@@ -6541,7 +6541,7 @@
                   <a:srgbClr val="C9A227"/>
                 </a:solidFill>
               </a:rPr>
-              <a:t>After Session 10:  </a:t>
+              <a:t>After Session 10:</a:t>
             </a:r>
             <a:r>
               <a:rPr sz="1100" b="0">
@@ -6947,7 +6947,7 @@
                   <a:srgbClr val="C9A227"/>
                 </a:solidFill>
               </a:rPr>
-              <a:t>▪  </a:t>
+              <a:t>▪</a:t>
             </a:r>
             <a:r>
               <a:rPr sz="1000" b="0">
@@ -6989,7 +6989,7 @@
                   <a:srgbClr val="C9A227"/>
                 </a:solidFill>
               </a:rPr>
-              <a:t>▪  </a:t>
+              <a:t>▪</a:t>
             </a:r>
             <a:r>
               <a:rPr sz="1000" b="0">
@@ -7031,7 +7031,7 @@
                   <a:srgbClr val="C9A227"/>
                 </a:solidFill>
               </a:rPr>
-              <a:t>▪  </a:t>
+              <a:t>▪</a:t>
             </a:r>
             <a:r>
               <a:rPr sz="1000" b="0">
@@ -7073,7 +7073,7 @@
                   <a:srgbClr val="C9A227"/>
                 </a:solidFill>
               </a:rPr>
-              <a:t>▪  </a:t>
+              <a:t>▪</a:t>
             </a:r>
             <a:r>
               <a:rPr sz="1000" b="0">
@@ -7272,7 +7272,7 @@
                   <a:srgbClr val="C9A227"/>
                 </a:solidFill>
               </a:rPr>
-              <a:t>▪  </a:t>
+              <a:t>▪</a:t>
             </a:r>
             <a:r>
               <a:rPr sz="1000" b="0">
@@ -7314,7 +7314,7 @@
                   <a:srgbClr val="C9A227"/>
                 </a:solidFill>
               </a:rPr>
-              <a:t>▪  </a:t>
+              <a:t>▪</a:t>
             </a:r>
             <a:r>
               <a:rPr sz="1000" b="0">
@@ -7356,7 +7356,7 @@
                   <a:srgbClr val="C9A227"/>
                 </a:solidFill>
               </a:rPr>
-              <a:t>▪  </a:t>
+              <a:t>▪</a:t>
             </a:r>
             <a:r>
               <a:rPr sz="1000" b="0">
@@ -7398,7 +7398,7 @@
                   <a:srgbClr val="C9A227"/>
                 </a:solidFill>
               </a:rPr>
-              <a:t>▪  </a:t>
+              <a:t>▪</a:t>
             </a:r>
             <a:r>
               <a:rPr sz="1000" b="0">
@@ -7597,7 +7597,7 @@
                   <a:srgbClr val="C9A227"/>
                 </a:solidFill>
               </a:rPr>
-              <a:t>▪  </a:t>
+              <a:t>▪</a:t>
             </a:r>
             <a:r>
               <a:rPr sz="1000" b="0">
@@ -7639,7 +7639,7 @@
                   <a:srgbClr val="C9A227"/>
                 </a:solidFill>
               </a:rPr>
-              <a:t>▪  </a:t>
+              <a:t>▪</a:t>
             </a:r>
             <a:r>
               <a:rPr sz="1000" b="0">
@@ -7681,7 +7681,7 @@
                   <a:srgbClr val="C9A227"/>
                 </a:solidFill>
               </a:rPr>
-              <a:t>▪  </a:t>
+              <a:t>▪</a:t>
             </a:r>
             <a:r>
               <a:rPr sz="1000" b="0">
@@ -7723,7 +7723,7 @@
                   <a:srgbClr val="C9A227"/>
                 </a:solidFill>
               </a:rPr>
-              <a:t>▪  </a:t>
+              <a:t>▪</a:t>
             </a:r>
             <a:r>
               <a:rPr sz="1000" b="0">
@@ -7853,7 +7853,7 @@
                   <a:srgbClr val="3A5C9E"/>
                 </a:solidFill>
               </a:rPr>
-              <a:t>THE DEMONSTRATION RUNS IN THREE MINUTES AND INCLUDES ONE FAILURE.  </a:t>
+              <a:t>THE DEMONSTRATION RUNS IN THREE MINUTES AND INCLUDES ONE FAILURE.</a:t>
             </a:r>
             <a:r>
               <a:rPr sz="1100" b="0">
@@ -7983,7 +7983,7 @@
                   <a:srgbClr val="C9A227"/>
                 </a:solidFill>
               </a:rPr>
-              <a:t>The whole module in one line:  </a:t>
+              <a:t>The whole module in one line:</a:t>
             </a:r>
             <a:r>
               <a:rPr sz="1200" b="0">
@@ -8025,7 +8025,7 @@
                   <a:srgbClr val="5D6B7E"/>
                 </a:solidFill>
               </a:rPr>
-              <a:t>ISBMS · PGDM 2025–27 · AGENTIC AI &amp; ADVANCED ANALYTICS IN FINANCE</a:t>
+              <a:t>AI IN FINANCE · THE COMPLETE CRASH COURSE</a:t>
             </a:r>
           </a:p>
         </p:txBody>
@@ -8345,7 +8345,7 @@
                   <a:srgbClr val="C9A227"/>
                 </a:solidFill>
               </a:rPr>
-              <a:t>▪  </a:t>
+              <a:t>▪</a:t>
             </a:r>
             <a:r>
               <a:rPr sz="950" b="0">
@@ -8387,7 +8387,7 @@
                   <a:srgbClr val="C9A227"/>
                 </a:solidFill>
               </a:rPr>
-              <a:t>▪  </a:t>
+              <a:t>▪</a:t>
             </a:r>
             <a:r>
               <a:rPr sz="950" b="0">
@@ -8429,7 +8429,7 @@
                   <a:srgbClr val="C9A227"/>
                 </a:solidFill>
               </a:rPr>
-              <a:t>▪  </a:t>
+              <a:t>▪</a:t>
             </a:r>
             <a:r>
               <a:rPr sz="950" b="0">
@@ -8584,7 +8584,7 @@
                   <a:srgbClr val="C9A227"/>
                 </a:solidFill>
               </a:rPr>
-              <a:t>▪  </a:t>
+              <a:t>▪</a:t>
             </a:r>
             <a:r>
               <a:rPr sz="950" b="0">
@@ -8626,7 +8626,7 @@
                   <a:srgbClr val="C9A227"/>
                 </a:solidFill>
               </a:rPr>
-              <a:t>▪  </a:t>
+              <a:t>▪</a:t>
             </a:r>
             <a:r>
               <a:rPr sz="950" b="0">
@@ -8668,7 +8668,7 @@
                   <a:srgbClr val="C9A227"/>
                 </a:solidFill>
               </a:rPr>
-              <a:t>▪  </a:t>
+              <a:t>▪</a:t>
             </a:r>
             <a:r>
               <a:rPr sz="950" b="0">
@@ -8710,7 +8710,7 @@
                   <a:srgbClr val="C9A227"/>
                 </a:solidFill>
               </a:rPr>
-              <a:t>▪  </a:t>
+              <a:t>▪</a:t>
             </a:r>
             <a:r>
               <a:rPr sz="950" b="0">
@@ -8905,7 +8905,7 @@
                   <a:srgbClr val="5D6B7E"/>
                 </a:solidFill>
               </a:rPr>
-              <a:t>ISBMS · PGDM 2025–27 · AGENTIC AI &amp; ADVANCED ANALYTICS IN FINANCE</a:t>
+              <a:t>AI IN FINANCE · THE COMPLETE CRASH COURSE</a:t>
             </a:r>
           </a:p>
         </p:txBody>
@@ -10281,7 +10281,7 @@
                   <a:srgbClr val="C9A227"/>
                 </a:solidFill>
               </a:rPr>
-              <a:t>Data flows upward only:  </a:t>
+              <a:t>Data flows upward only:</a:t>
             </a:r>
             <a:r>
               <a:rPr sz="1200" b="0">
@@ -10323,7 +10323,7 @@
                   <a:srgbClr val="5D6B7E"/>
                 </a:solidFill>
               </a:rPr>
-              <a:t>ISBMS · PGDM 2025–27 · AGENTIC AI &amp; ADVANCED ANALYTICS IN FINANCE</a:t>
+              <a:t>AI IN FINANCE · THE COMPLETE CRASH COURSE</a:t>
             </a:r>
           </a:p>
         </p:txBody>
@@ -12325,7 +12325,7 @@
                   <a:srgbClr val="C9A227"/>
                 </a:solidFill>
               </a:rPr>
-              <a:t>Three tests before you write a line of code:  </a:t>
+              <a:t>Three tests before you write a line of code:</a:t>
             </a:r>
             <a:r>
               <a:rPr sz="1200" b="0">
@@ -12367,7 +12367,7 @@
                   <a:srgbClr val="5D6B7E"/>
                 </a:solidFill>
               </a:rPr>
-              <a:t>ISBMS · PGDM 2025–27 · AGENTIC AI &amp; ADVANCED ANALYTICS IN FINANCE</a:t>
+              <a:t>AI IN FINANCE · THE COMPLETE CRASH COURSE</a:t>
             </a:r>
           </a:p>
         </p:txBody>
@@ -13345,7 +13345,7 @@
                   <a:srgbClr val="5D6B7E"/>
                 </a:solidFill>
               </a:rPr>
-              <a:t>ISBMS · PGDM 2025–27 · AGENTIC AI &amp; ADVANCED ANALYTICS IN FINANCE</a:t>
+              <a:t>AI IN FINANCE · THE COMPLETE CRASH COURSE</a:t>
             </a:r>
           </a:p>
         </p:txBody>
@@ -13965,7 +13965,7 @@
                   <a:srgbClr val="5D6B7E"/>
                 </a:solidFill>
               </a:rPr>
-              <a:t>ISBMS · PGDM 2025–27 · AGENTIC AI &amp; ADVANCED ANALYTICS IN FINANCE</a:t>
+              <a:t>AI IN FINANCE · THE COMPLETE CRASH COURSE</a:t>
             </a:r>
           </a:p>
         </p:txBody>
@@ -15044,7 +15044,7 @@
                   <a:srgbClr val="C9A227"/>
                 </a:solidFill>
               </a:rPr>
-              <a:t>▪  </a:t>
+              <a:t>▪</a:t>
             </a:r>
             <a:r>
               <a:rPr sz="950" b="0">
@@ -15086,7 +15086,7 @@
                   <a:srgbClr val="C9A227"/>
                 </a:solidFill>
               </a:rPr>
-              <a:t>▪  </a:t>
+              <a:t>▪</a:t>
             </a:r>
             <a:r>
               <a:rPr sz="950" b="0">
@@ -15128,7 +15128,7 @@
                   <a:srgbClr val="C9A227"/>
                 </a:solidFill>
               </a:rPr>
-              <a:t>▪  </a:t>
+              <a:t>▪</a:t>
             </a:r>
             <a:r>
               <a:rPr sz="950" b="0">
@@ -15170,7 +15170,7 @@
                   <a:srgbClr val="C9A227"/>
                 </a:solidFill>
               </a:rPr>
-              <a:t>▪  </a:t>
+              <a:t>▪</a:t>
             </a:r>
             <a:r>
               <a:rPr sz="950" b="0">
@@ -15212,7 +15212,7 @@
                   <a:srgbClr val="C9A227"/>
                 </a:solidFill>
               </a:rPr>
-              <a:t>▪  </a:t>
+              <a:t>▪</a:t>
             </a:r>
             <a:r>
               <a:rPr sz="950" b="0">
@@ -15254,7 +15254,7 @@
                   <a:srgbClr val="C9A227"/>
                 </a:solidFill>
               </a:rPr>
-              <a:t>▪  </a:t>
+              <a:t>▪</a:t>
             </a:r>
             <a:r>
               <a:rPr sz="950" b="0">
@@ -15296,7 +15296,7 @@
                   <a:srgbClr val="C9A227"/>
                 </a:solidFill>
               </a:rPr>
-              <a:t>▪  </a:t>
+              <a:t>▪</a:t>
             </a:r>
             <a:r>
               <a:rPr sz="950" b="0">
@@ -15338,7 +15338,7 @@
                   <a:srgbClr val="C9A227"/>
                 </a:solidFill>
               </a:rPr>
-              <a:t>▪  </a:t>
+              <a:t>▪</a:t>
             </a:r>
             <a:r>
               <a:rPr sz="950" b="0">
@@ -15380,7 +15380,7 @@
                   <a:srgbClr val="C9A227"/>
                 </a:solidFill>
               </a:rPr>
-              <a:t>▪  </a:t>
+              <a:t>▪</a:t>
             </a:r>
             <a:r>
               <a:rPr sz="950" b="0">
@@ -15422,7 +15422,7 @@
                   <a:srgbClr val="C9A227"/>
                 </a:solidFill>
               </a:rPr>
-              <a:t>▪  </a:t>
+              <a:t>▪</a:t>
             </a:r>
             <a:r>
               <a:rPr sz="950" b="0">
@@ -15552,7 +15552,7 @@
                   <a:srgbClr val="C9A227"/>
                 </a:solidFill>
               </a:rPr>
-              <a:t>A page that works only on your laptop is not deployed:  </a:t>
+              <a:t>A page that works only on your laptop is not deployed:</a:t>
             </a:r>
             <a:r>
               <a:rPr sz="1200" b="0">
@@ -15594,7 +15594,7 @@
                   <a:srgbClr val="5D6B7E"/>
                 </a:solidFill>
               </a:rPr>
-              <a:t>ISBMS · PGDM 2025–27 · AGENTIC AI &amp; ADVANCED ANALYTICS IN FINANCE</a:t>
+              <a:t>AI IN FINANCE · THE COMPLETE CRASH COURSE</a:t>
             </a:r>
           </a:p>
         </p:txBody>
@@ -15914,7 +15914,7 @@
                   <a:srgbClr val="C9A227"/>
                 </a:solidFill>
               </a:rPr>
-              <a:t>▪  </a:t>
+              <a:t>▪</a:t>
             </a:r>
             <a:r>
               <a:rPr sz="950" b="0">
@@ -15956,7 +15956,7 @@
                   <a:srgbClr val="C9A227"/>
                 </a:solidFill>
               </a:rPr>
-              <a:t>▪  </a:t>
+              <a:t>▪</a:t>
             </a:r>
             <a:r>
               <a:rPr sz="950" b="0">
@@ -15998,7 +15998,7 @@
                   <a:srgbClr val="C9A227"/>
                 </a:solidFill>
               </a:rPr>
-              <a:t>▪  </a:t>
+              <a:t>▪</a:t>
             </a:r>
             <a:r>
               <a:rPr sz="950" b="0">
@@ -16040,7 +16040,7 @@
                   <a:srgbClr val="C9A227"/>
                 </a:solidFill>
               </a:rPr>
-              <a:t>▪  </a:t>
+              <a:t>▪</a:t>
             </a:r>
             <a:r>
               <a:rPr sz="950" b="0">
@@ -16239,7 +16239,7 @@
                   <a:srgbClr val="C9A227"/>
                 </a:solidFill>
               </a:rPr>
-              <a:t>▪  </a:t>
+              <a:t>▪</a:t>
             </a:r>
             <a:r>
               <a:rPr sz="950" b="0">
@@ -16281,7 +16281,7 @@
                   <a:srgbClr val="C9A227"/>
                 </a:solidFill>
               </a:rPr>
-              <a:t>▪  </a:t>
+              <a:t>▪</a:t>
             </a:r>
             <a:r>
               <a:rPr sz="950" b="0">
@@ -16323,7 +16323,7 @@
                   <a:srgbClr val="C9A227"/>
                 </a:solidFill>
               </a:rPr>
-              <a:t>▪  </a:t>
+              <a:t>▪</a:t>
             </a:r>
             <a:r>
               <a:rPr sz="950" b="0">
@@ -16365,7 +16365,7 @@
                   <a:srgbClr val="C9A227"/>
                 </a:solidFill>
               </a:rPr>
-              <a:t>▪  </a:t>
+              <a:t>▪</a:t>
             </a:r>
             <a:r>
               <a:rPr sz="950" b="0">
@@ -16564,7 +16564,7 @@
                   <a:srgbClr val="C9A227"/>
                 </a:solidFill>
               </a:rPr>
-              <a:t>▪  </a:t>
+              <a:t>▪</a:t>
             </a:r>
             <a:r>
               <a:rPr sz="950" b="0">
@@ -16606,7 +16606,7 @@
                   <a:srgbClr val="C9A227"/>
                 </a:solidFill>
               </a:rPr>
-              <a:t>▪  </a:t>
+              <a:t>▪</a:t>
             </a:r>
             <a:r>
               <a:rPr sz="950" b="0">
@@ -16648,7 +16648,7 @@
                   <a:srgbClr val="C9A227"/>
                 </a:solidFill>
               </a:rPr>
-              <a:t>▪  </a:t>
+              <a:t>▪</a:t>
             </a:r>
             <a:r>
               <a:rPr sz="950" b="0">
@@ -16965,7 +16965,7 @@
                   <a:srgbClr val="5D6B7E"/>
                 </a:solidFill>
               </a:rPr>
-              <a:t>ISBMS · PGDM 2025–27 · AGENTIC AI &amp; ADVANCED ANALYTICS IN FINANCE</a:t>
+              <a:t>AI IN FINANCE · THE COMPLETE CRASH COURSE</a:t>
             </a:r>
           </a:p>
         </p:txBody>
